--- a/example/deepseek harness_LongCat-2.5-Preview_个人信息介绍.pptx
+++ b/example/deepseek harness_LongCat-2.5-Preview_个人信息介绍.pptx
@@ -581,7 +581,7 @@
           <a:lstStyle/>
           <a:p>
             <a:r>
-              <a:t>收尾：既会做系统，也会把方法沉淀为可复用的工程资产。开源双技能Haute GSAP Skills和Universal PPT，分别蒸馏自定义动效体系和全场景PPT生成系统。</a:t>
+              <a:t>收尾：既会做系统，也会把方法沉淀为可复用的工程资产。开源双技能Haute GSAP Skills和Universal PPT，分别提炼自定义动效体系和全场景PPT生成系统。</a:t>
             </a:r>
           </a:p>
         </p:txBody>
@@ -1001,7 +1001,7 @@
           <a:lstStyle/>
           <a:p>
             <a:r>
-              <a:t>个人博客是零模板依赖的多页面站点，开源技能月Haute GSAP Skills和Universal PPT，分别蒸馏自定义动效体系和17个开源PPT skill。</a:t>
+              <a:t>个人博客是零模板依赖的多页面站点，开源技能月Haute GSAP Skills和Universal PPT，分别提炼自定义动效体系和17个开源PPT skill。</a:t>
             </a:r>
           </a:p>
         </p:txBody>
@@ -7474,7 +7474,7 @@
               </a:defRPr>
             </a:pPr>
             <a:r>
-              <a:t>  17个开源skill蒸馏</a:t>
+              <a:t>  17个开源skill提炼</a:t>
             </a:r>
           </a:p>
         </p:txBody>
